--- a/week7_pythonII/week7_python_chap9.pptx
+++ b/week7_pythonII/week7_python_chap9.pptx
@@ -214,7 +214,7 @@
           <a:p>
             <a:fld id="{976AFC6F-2922-2443-A2A7-8FC41FA455C3}" type="datetimeFigureOut">
               <a:rPr lang="en-US" smtClean="0"/>
-              <a:t>10/8/24</a:t>
+              <a:t>10/6/25</a:t>
             </a:fld>
             <a:endParaRPr lang="en-US"/>
           </a:p>
@@ -1132,7 +1132,7 @@
           <a:p>
             <a:fld id="{A4D148A6-5714-8649-8AB3-5088539201B5}" type="datetimeFigureOut">
               <a:rPr lang="en-US" smtClean="0"/>
-              <a:t>10/8/24</a:t>
+              <a:t>10/6/25</a:t>
             </a:fld>
             <a:endParaRPr lang="en-US"/>
           </a:p>
@@ -1330,7 +1330,7 @@
           <a:p>
             <a:fld id="{A4D148A6-5714-8649-8AB3-5088539201B5}" type="datetimeFigureOut">
               <a:rPr lang="en-US" smtClean="0"/>
-              <a:t>10/8/24</a:t>
+              <a:t>10/6/25</a:t>
             </a:fld>
             <a:endParaRPr lang="en-US"/>
           </a:p>
@@ -1538,7 +1538,7 @@
           <a:p>
             <a:fld id="{A4D148A6-5714-8649-8AB3-5088539201B5}" type="datetimeFigureOut">
               <a:rPr lang="en-US" smtClean="0"/>
-              <a:t>10/8/24</a:t>
+              <a:t>10/6/25</a:t>
             </a:fld>
             <a:endParaRPr lang="en-US"/>
           </a:p>
@@ -1736,7 +1736,7 @@
           <a:p>
             <a:fld id="{A4D148A6-5714-8649-8AB3-5088539201B5}" type="datetimeFigureOut">
               <a:rPr lang="en-US" smtClean="0"/>
-              <a:t>10/8/24</a:t>
+              <a:t>10/6/25</a:t>
             </a:fld>
             <a:endParaRPr lang="en-US"/>
           </a:p>
@@ -2011,7 +2011,7 @@
           <a:p>
             <a:fld id="{A4D148A6-5714-8649-8AB3-5088539201B5}" type="datetimeFigureOut">
               <a:rPr lang="en-US" smtClean="0"/>
-              <a:t>10/8/24</a:t>
+              <a:t>10/6/25</a:t>
             </a:fld>
             <a:endParaRPr lang="en-US"/>
           </a:p>
@@ -2276,7 +2276,7 @@
           <a:p>
             <a:fld id="{A4D148A6-5714-8649-8AB3-5088539201B5}" type="datetimeFigureOut">
               <a:rPr lang="en-US" smtClean="0"/>
-              <a:t>10/8/24</a:t>
+              <a:t>10/6/25</a:t>
             </a:fld>
             <a:endParaRPr lang="en-US"/>
           </a:p>
@@ -2688,7 +2688,7 @@
           <a:p>
             <a:fld id="{A4D148A6-5714-8649-8AB3-5088539201B5}" type="datetimeFigureOut">
               <a:rPr lang="en-US" smtClean="0"/>
-              <a:t>10/8/24</a:t>
+              <a:t>10/6/25</a:t>
             </a:fld>
             <a:endParaRPr lang="en-US"/>
           </a:p>
@@ -2829,7 +2829,7 @@
           <a:p>
             <a:fld id="{A4D148A6-5714-8649-8AB3-5088539201B5}" type="datetimeFigureOut">
               <a:rPr lang="en-US" smtClean="0"/>
-              <a:t>10/8/24</a:t>
+              <a:t>10/6/25</a:t>
             </a:fld>
             <a:endParaRPr lang="en-US"/>
           </a:p>
@@ -2942,7 +2942,7 @@
           <a:p>
             <a:fld id="{A4D148A6-5714-8649-8AB3-5088539201B5}" type="datetimeFigureOut">
               <a:rPr lang="en-US" smtClean="0"/>
-              <a:t>10/8/24</a:t>
+              <a:t>10/6/25</a:t>
             </a:fld>
             <a:endParaRPr lang="en-US"/>
           </a:p>
@@ -3253,7 +3253,7 @@
           <a:p>
             <a:fld id="{A4D148A6-5714-8649-8AB3-5088539201B5}" type="datetimeFigureOut">
               <a:rPr lang="en-US" smtClean="0"/>
-              <a:t>10/8/24</a:t>
+              <a:t>10/6/25</a:t>
             </a:fld>
             <a:endParaRPr lang="en-US"/>
           </a:p>
@@ -3541,7 +3541,7 @@
           <a:p>
             <a:fld id="{A4D148A6-5714-8649-8AB3-5088539201B5}" type="datetimeFigureOut">
               <a:rPr lang="en-US" smtClean="0"/>
-              <a:t>10/8/24</a:t>
+              <a:t>10/6/25</a:t>
             </a:fld>
             <a:endParaRPr lang="en-US"/>
           </a:p>
@@ -3782,7 +3782,7 @@
           <a:p>
             <a:fld id="{A4D148A6-5714-8649-8AB3-5088539201B5}" type="datetimeFigureOut">
               <a:rPr lang="en-US" smtClean="0"/>
-              <a:t>10/8/24</a:t>
+              <a:t>10/6/25</a:t>
             </a:fld>
             <a:endParaRPr lang="en-US"/>
           </a:p>
@@ -4214,7 +4214,7 @@
         <p:spPr>
           <a:xfrm>
             <a:off x="1636285" y="1250762"/>
-            <a:ext cx="9403536" cy="3108543"/>
+            <a:ext cx="5152373" cy="2677656"/>
           </a:xfrm>
           <a:prstGeom prst="rect">
             <a:avLst/>
@@ -4227,29 +4227,6 @@
           </a:bodyPr>
           <a:lstStyle/>
           <a:p>
-            <a:r>
-              <a:rPr lang="en-US" sz="2800" b="1" dirty="0">
-                <a:latin typeface="Helvetica Light" panose="020B0403020202020204" pitchFamily="34" charset="0"/>
-              </a:rPr>
-              <a:t>I.  </a:t>
-            </a:r>
-            <a:r>
-              <a:rPr lang="en-US" sz="2800" dirty="0">
-                <a:latin typeface="Helvetica Light" panose="020B0403020202020204" pitchFamily="34" charset="0"/>
-              </a:rPr>
-              <a:t>Chapter 9 </a:t>
-            </a:r>
-            <a:r>
-              <a:rPr lang="en-US" sz="2400" dirty="0">
-                <a:latin typeface="Helvetica Light" panose="020B0403020202020204" pitchFamily="34" charset="0"/>
-              </a:rPr>
-              <a:t>(we will come back to dictionaries in several weeks)</a:t>
-            </a:r>
-          </a:p>
-          <a:p>
-            <a:pPr marL="571500" indent="-571500">
-              <a:buAutoNum type="romanUcPeriod"/>
-            </a:pPr>
             <a:endParaRPr lang="en-US" sz="2800" dirty="0">
               <a:latin typeface="Helvetica Light" panose="020B0403020202020204" pitchFamily="34" charset="0"/>
             </a:endParaRPr>
@@ -4259,7 +4236,7 @@
               <a:rPr lang="en-US" sz="2800" b="1" dirty="0">
                 <a:latin typeface="Helvetica Light" panose="020B0403020202020204" pitchFamily="34" charset="0"/>
               </a:rPr>
-              <a:t>II. l</a:t>
+              <a:t>I. l</a:t>
             </a:r>
             <a:r>
               <a:rPr lang="en-US" sz="2800" dirty="0">
@@ -4273,58 +4250,52 @@
             </a:endParaRPr>
           </a:p>
           <a:p>
+            <a:endParaRPr lang="en-US" sz="2800" b="1" dirty="0">
+              <a:latin typeface="Helvetica Light" panose="020B0403020202020204" pitchFamily="34" charset="0"/>
+            </a:endParaRPr>
+          </a:p>
+          <a:p>
             <a:r>
               <a:rPr lang="en-US" sz="2800" b="1" dirty="0">
                 <a:latin typeface="Helvetica Light" panose="020B0403020202020204" pitchFamily="34" charset="0"/>
               </a:rPr>
-              <a:t> </a:t>
-            </a:r>
+              <a:t>II. </a:t>
+            </a:r>
+            <a:r>
+              <a:rPr lang="en-US" sz="2800" b="1" dirty="0">
+                <a:latin typeface="Courier New" panose="02070309020205020404" pitchFamily="49" charset="0"/>
+                <a:cs typeface="Courier New" panose="02070309020205020404" pitchFamily="49" charset="0"/>
+              </a:rPr>
+              <a:t>if-else</a:t>
+            </a:r>
+            <a:r>
+              <a:rPr lang="en-US" sz="2800" b="1" dirty="0">
+                <a:latin typeface="Helvetica Light" panose="020B0403020202020204" pitchFamily="34" charset="0"/>
+              </a:rPr>
+              <a:t>, </a:t>
+            </a:r>
+            <a:r>
+              <a:rPr lang="en-US" sz="2800" b="1" dirty="0">
+                <a:latin typeface="Courier New" panose="02070309020205020404" pitchFamily="49" charset="0"/>
+                <a:cs typeface="Courier New" panose="02070309020205020404" pitchFamily="49" charset="0"/>
+              </a:rPr>
+              <a:t>for</a:t>
+            </a:r>
+            <a:endParaRPr lang="en-US" sz="2800" b="1" dirty="0">
+              <a:latin typeface="Helvetica Light" panose="020B0403020202020204" pitchFamily="34" charset="0"/>
+            </a:endParaRPr>
+          </a:p>
+          <a:p>
             <a:endParaRPr lang="en-US" sz="2800" dirty="0">
               <a:latin typeface="Helvetica Light" panose="020B0403020202020204" pitchFamily="34" charset="0"/>
             </a:endParaRPr>
           </a:p>
           <a:p>
             <a:r>
-              <a:rPr lang="en-US" sz="2800" b="1" dirty="0">
+              <a:rPr lang="en-US" sz="2800" b="1">
                 <a:latin typeface="Helvetica Light" panose="020B0403020202020204" pitchFamily="34" charset="0"/>
               </a:rPr>
               <a:t>III. </a:t>
-            </a:r>
-            <a:r>
-              <a:rPr lang="en-US" sz="2800" b="1" dirty="0">
-                <a:latin typeface="Courier New" panose="02070309020205020404" pitchFamily="49" charset="0"/>
-                <a:cs typeface="Courier New" panose="02070309020205020404" pitchFamily="49" charset="0"/>
-              </a:rPr>
-              <a:t>if-else</a:t>
-            </a:r>
-            <a:r>
-              <a:rPr lang="en-US" sz="2800" b="1" dirty="0">
-                <a:latin typeface="Helvetica Light" panose="020B0403020202020204" pitchFamily="34" charset="0"/>
-              </a:rPr>
-              <a:t>, </a:t>
-            </a:r>
-            <a:r>
-              <a:rPr lang="en-US" sz="2800" b="1" dirty="0">
-                <a:latin typeface="Courier New" panose="02070309020205020404" pitchFamily="49" charset="0"/>
-                <a:cs typeface="Courier New" panose="02070309020205020404" pitchFamily="49" charset="0"/>
-              </a:rPr>
-              <a:t>for</a:t>
-            </a:r>
-            <a:endParaRPr lang="en-US" sz="2800" b="1" dirty="0">
-              <a:latin typeface="Helvetica Light" panose="020B0403020202020204" pitchFamily="34" charset="0"/>
-            </a:endParaRPr>
-          </a:p>
-          <a:p>
-            <a:endParaRPr lang="en-US" sz="2800" dirty="0">
-              <a:latin typeface="Helvetica Light" panose="020B0403020202020204" pitchFamily="34" charset="0"/>
-            </a:endParaRPr>
-          </a:p>
-          <a:p>
-            <a:r>
-              <a:rPr lang="en-US" sz="2800" b="1" dirty="0">
-                <a:latin typeface="Helvetica Light" panose="020B0403020202020204" pitchFamily="34" charset="0"/>
-              </a:rPr>
-              <a:t>IV. </a:t>
             </a:r>
             <a:r>
               <a:rPr lang="en-US" sz="2800" dirty="0">

--- a/week7_pythonII/week7_python_chap9.pptx
+++ b/week7_pythonII/week7_python_chap9.pptx
@@ -4292,7 +4292,7 @@
           </a:p>
           <a:p>
             <a:r>
-              <a:rPr lang="en-US" sz="2800" b="1">
+              <a:rPr lang="en-US" sz="2800" b="1" dirty="0">
                 <a:latin typeface="Helvetica Light" panose="020B0403020202020204" pitchFamily="34" charset="0"/>
               </a:rPr>
               <a:t>III. </a:t>
@@ -8333,16 +8333,10 @@
           <a:lstStyle/>
           <a:p>
             <a:r>
-              <a:rPr lang="en-US" sz="3000">
-                <a:latin typeface="Courier" pitchFamily="2" charset="0"/>
-              </a:rPr>
-              <a:t>Num</a:t>
-            </a:r>
-            <a:r>
               <a:rPr lang="en-US" sz="3000" dirty="0">
                 <a:latin typeface="Courier" pitchFamily="2" charset="0"/>
               </a:rPr>
-              <a:t>=</a:t>
+              <a:t>Num=</a:t>
             </a:r>
             <a:r>
               <a:rPr lang="en-US" sz="3000" dirty="0">
